--- a/site/clases/parte-6-sistemas-de-recomendacion/216-filtrado-colaborativo-user-based-e-item-based/clase-216-filtrado-colaborativo-user-based-e-item-based-presentacion.pptx
+++ b/site/clases/parte-6-sistemas-de-recomendacion/216-filtrado-colaborativo-user-based-e-item-based/clase-216-filtrado-colaborativo-user-based-e-item-based-presentacion.pptx
@@ -3272,7 +3272,7 @@
                 </a:solidFill>
                 <a:latin typeface="Segoe UI"/>
               </a:rPr>
-              <a:t>Parte: 6 — Sistemas de Recomendación · Fuente: Aggarwal, Recommender Systems: The Textbook (Springer, 2016) cap. 2 + Linden, Smith, York (Amazon, 2003) Item-to-Item Collaborative Filtering.  Duración estimada: 75 min.</a:t>
+              <a:t>Parte: 6 — Sistemas de Recomendación · Fuente: Aggarwal, Recommender Systems: The Textbook (Springer, 2016) cap. 2 + Linden, Smith, York (Amazon, 2003) Item-to-Item Collaborative Filtering.  Duración estimada: 75 min. · Nivel: Intermedio-Avanzado</a:t>
             </a:r>
           </a:p>
         </p:txBody>
@@ -3581,7 +3581,7 @@
                 </a:solidFill>
                 <a:latin typeface="Segoe UI"/>
               </a:rPr>
-              <a:t>Parte: 6 — Sistemas de Recomendación · Fuente: Aggarwal, Recommender Systems: The Textbook (Springer, 2016) cap. 2 + Linden, Smith, York (Amazon, 2003) Item-to-Item Collaborative Filtering.  Duración estimada: 75 min.</a:t>
+              <a:t>Parte: 6 — Sistemas de Recomendación · Fuente: Aggarwal, Recommender Systems: The Textbook (Springer, 2016) cap. 2 + Linden, Smith, York (Amazon, 2003) Item-to-Item Collaborative Filtering.  Duración estimada: 75 min. · Nivel: Intermedio-Avanzado</a:t>
             </a:r>
           </a:p>
         </p:txBody>
